--- a/data-eng/decks/w1d5s0.pptx
+++ b/data-eng/decks/w1d5s0.pptx
@@ -3514,7 +3514,7 @@
                 <a:ea typeface="Pretendard"/>
                 <a:cs typeface="Pretendard"/>
               </a:rPr>
-              <a:t>모두 같은 출발선에서 — 꼬이면 여기로 돌아온다</a:t>
+              <a:t>모두 같은 환경에서 시작합니다 — 꼬이면 여기로 돌아옵니다</a:t>
             </a:r>
           </a:p>
         </p:txBody>
@@ -10458,7 +10458,7 @@
                 <a:ea typeface="Pretendard"/>
                 <a:cs typeface="Pretendard"/>
               </a:rPr>
-              <a:t>출발선에 섰는지</a:t>
+              <a:t>수업 준비가 끝났는지</a:t>
             </a:r>
           </a:p>
         </p:txBody>
@@ -11561,7 +11561,7 @@
                 <a:ea typeface="Pretendard"/>
                 <a:cs typeface="Pretendard"/>
               </a:rPr>
-              <a:t>출발선이 맞춰졌으니 파일 하나로 환경 전체를 적는 법을 배웁니다</a:t>
+              <a:t>점검을 마쳤으니 파일 하나로 환경 전체를 적는 법을 배웁니다</a:t>
             </a:r>
           </a:p>
         </p:txBody>

--- a/data-eng/decks/w1d5s0.pptx
+++ b/data-eng/decks/w1d5s0.pptx
@@ -3098,7 +3098,7 @@
       <p:grpSpPr/>
       <p:sp>
         <p:nvSpPr>
-          <p:cNvPr id="2" name="Oval 1"/>
+          <p:cNvPr id="2" name="deckgen:decor"/>
           <p:cNvSpPr/>
           <p:nvPr/>
         </p:nvSpPr>
@@ -3128,7 +3128,7 @@
       </p:sp>
       <p:sp>
         <p:nvSpPr>
-          <p:cNvPr id="3" name="Oval 2"/>
+          <p:cNvPr id="3" name="deckgen:decor"/>
           <p:cNvSpPr/>
           <p:nvPr/>
         </p:nvSpPr>
@@ -3158,7 +3158,7 @@
       </p:sp>
       <p:sp>
         <p:nvSpPr>
-          <p:cNvPr id="4" name="Oval 3"/>
+          <p:cNvPr id="4" name="deckgen:decor"/>
           <p:cNvSpPr/>
           <p:nvPr/>
         </p:nvSpPr>
@@ -3188,7 +3188,7 @@
       </p:sp>
       <p:sp>
         <p:nvSpPr>
-          <p:cNvPr id="5" name="Rectangle 4"/>
+          <p:cNvPr id="5" name="deckgen:decor"/>
           <p:cNvSpPr/>
           <p:nvPr/>
         </p:nvSpPr>
@@ -3218,7 +3218,7 @@
       </p:sp>
       <p:sp>
         <p:nvSpPr>
-          <p:cNvPr id="6" name="Oval 5"/>
+          <p:cNvPr id="6" name="deckgen:decor"/>
           <p:cNvSpPr/>
           <p:nvPr/>
         </p:nvSpPr>
@@ -3248,7 +3248,7 @@
       </p:sp>
       <p:sp>
         <p:nvSpPr>
-          <p:cNvPr id="7" name="Oval 6"/>
+          <p:cNvPr id="7" name="deckgen:decor"/>
           <p:cNvSpPr/>
           <p:nvPr/>
         </p:nvSpPr>
@@ -3278,7 +3278,7 @@
       </p:sp>
       <p:sp>
         <p:nvSpPr>
-          <p:cNvPr id="8" name="Oval 7"/>
+          <p:cNvPr id="8" name="deckgen:decor"/>
           <p:cNvSpPr/>
           <p:nvPr/>
         </p:nvSpPr>
@@ -3308,7 +3308,7 @@
       </p:sp>
       <p:sp>
         <p:nvSpPr>
-          <p:cNvPr id="9" name="Oval 8"/>
+          <p:cNvPr id="9" name="deckgen:decor"/>
           <p:cNvSpPr/>
           <p:nvPr/>
         </p:nvSpPr>
@@ -3338,7 +3338,7 @@
       </p:sp>
       <p:sp>
         <p:nvSpPr>
-          <p:cNvPr id="10" name="Rectangle 9"/>
+          <p:cNvPr id="10" name="deckgen:decor"/>
           <p:cNvSpPr/>
           <p:nvPr/>
         </p:nvSpPr>
@@ -3598,7 +3598,7 @@
       <p:grpSpPr/>
       <p:sp>
         <p:nvSpPr>
-          <p:cNvPr id="2" name="Oval 1"/>
+          <p:cNvPr id="2" name="deckgen:decor"/>
           <p:cNvSpPr/>
           <p:nvPr/>
         </p:nvSpPr>
@@ -3628,7 +3628,7 @@
       </p:sp>
       <p:sp>
         <p:nvSpPr>
-          <p:cNvPr id="3" name="Oval 2"/>
+          <p:cNvPr id="3" name="deckgen:decor"/>
           <p:cNvSpPr/>
           <p:nvPr/>
         </p:nvSpPr>
@@ -3658,7 +3658,7 @@
       </p:sp>
       <p:sp>
         <p:nvSpPr>
-          <p:cNvPr id="4" name="Oval 3"/>
+          <p:cNvPr id="4" name="deckgen:decor"/>
           <p:cNvSpPr/>
           <p:nvPr/>
         </p:nvSpPr>
@@ -4589,7 +4589,7 @@
       <p:grpSpPr/>
       <p:sp>
         <p:nvSpPr>
-          <p:cNvPr id="2" name="Oval 1"/>
+          <p:cNvPr id="2" name="deckgen:decor"/>
           <p:cNvSpPr/>
           <p:nvPr/>
         </p:nvSpPr>
@@ -4619,7 +4619,7 @@
       </p:sp>
       <p:sp>
         <p:nvSpPr>
-          <p:cNvPr id="3" name="Oval 2"/>
+          <p:cNvPr id="3" name="deckgen:decor"/>
           <p:cNvSpPr/>
           <p:nvPr/>
         </p:nvSpPr>
@@ -4649,7 +4649,7 @@
       </p:sp>
       <p:sp>
         <p:nvSpPr>
-          <p:cNvPr id="4" name="Oval 3"/>
+          <p:cNvPr id="4" name="deckgen:decor"/>
           <p:cNvSpPr/>
           <p:nvPr/>
         </p:nvSpPr>
@@ -4855,7 +4855,7 @@
       </p:sp>
       <p:sp>
         <p:nvSpPr>
-          <p:cNvPr id="10" name="TextBox 9"/>
+          <p:cNvPr id="10" name="deckgen:ornament"/>
           <p:cNvSpPr txBox="1"/>
           <p:nvPr/>
         </p:nvSpPr>
@@ -5040,7 +5040,7 @@
       </p:sp>
       <p:sp>
         <p:nvSpPr>
-          <p:cNvPr id="14" name="TextBox 13"/>
+          <p:cNvPr id="14" name="deckgen:ornament"/>
           <p:cNvSpPr txBox="1"/>
           <p:nvPr/>
         </p:nvSpPr>
@@ -5362,7 +5362,7 @@
       <p:grpSpPr/>
       <p:sp>
         <p:nvSpPr>
-          <p:cNvPr id="2" name="Oval 1"/>
+          <p:cNvPr id="2" name="deckgen:decor"/>
           <p:cNvSpPr/>
           <p:nvPr/>
         </p:nvSpPr>
@@ -5392,7 +5392,7 @@
       </p:sp>
       <p:sp>
         <p:nvSpPr>
-          <p:cNvPr id="3" name="Oval 2"/>
+          <p:cNvPr id="3" name="deckgen:decor"/>
           <p:cNvSpPr/>
           <p:nvPr/>
         </p:nvSpPr>
@@ -5422,7 +5422,7 @@
       </p:sp>
       <p:sp>
         <p:nvSpPr>
-          <p:cNvPr id="4" name="Oval 3"/>
+          <p:cNvPr id="4" name="deckgen:decor"/>
           <p:cNvSpPr/>
           <p:nvPr/>
         </p:nvSpPr>
@@ -5703,7 +5703,7 @@
                 <a:ea typeface="Pretendard"/>
                 <a:cs typeface="Pretendard"/>
               </a:rPr>
-              <a:t>1 Docker 켜짐</a:t>
+              <a:t>1. Docker 켜짐</a:t>
             </a:r>
           </a:p>
         </p:txBody>
@@ -5849,7 +5849,7 @@
                 <a:ea typeface="Pretendard"/>
                 <a:cs typeface="Pretendard"/>
               </a:rPr>
-              <a:t>2 app 폴더</a:t>
+              <a:t>2. app 폴더</a:t>
             </a:r>
           </a:p>
         </p:txBody>
@@ -5995,7 +5995,7 @@
                 <a:ea typeface="Pretendard"/>
                 <a:cs typeface="Pretendard"/>
               </a:rPr>
-              <a:t>3 포트 비우기</a:t>
+              <a:t>3. 포트 비우기</a:t>
             </a:r>
           </a:p>
         </p:txBody>
@@ -6141,7 +6141,7 @@
                 <a:ea typeface="Pretendard"/>
                 <a:cs typeface="Pretendard"/>
               </a:rPr>
-              <a:t>4 이미지 받기</a:t>
+              <a:t>4. 이미지 받기</a:t>
             </a:r>
           </a:p>
         </p:txBody>
@@ -6287,7 +6287,7 @@
                 <a:ea typeface="Pretendard"/>
                 <a:cs typeface="Pretendard"/>
               </a:rPr>
-              <a:t>5 9.18 반영</a:t>
+              <a:t>5. 9.18 반영</a:t>
             </a:r>
           </a:p>
         </p:txBody>
@@ -6433,7 +6433,7 @@
                 <a:ea typeface="Pretendard"/>
                 <a:cs typeface="Pretendard"/>
               </a:rPr>
-              <a:t>6 환경 재설정</a:t>
+              <a:t>6. 환경 재설정</a:t>
             </a:r>
           </a:p>
         </p:txBody>
@@ -6611,7 +6611,7 @@
       <p:grpSpPr/>
       <p:sp>
         <p:nvSpPr>
-          <p:cNvPr id="2" name="Oval 1"/>
+          <p:cNvPr id="2" name="deckgen:decor"/>
           <p:cNvSpPr/>
           <p:nvPr/>
         </p:nvSpPr>
@@ -6641,7 +6641,7 @@
       </p:sp>
       <p:sp>
         <p:nvSpPr>
-          <p:cNvPr id="3" name="Oval 2"/>
+          <p:cNvPr id="3" name="deckgen:decor"/>
           <p:cNvSpPr/>
           <p:nvPr/>
         </p:nvSpPr>
@@ -6671,7 +6671,7 @@
       </p:sp>
       <p:sp>
         <p:nvSpPr>
-          <p:cNvPr id="4" name="Oval 3"/>
+          <p:cNvPr id="4" name="deckgen:decor"/>
           <p:cNvSpPr/>
           <p:nvPr/>
         </p:nvSpPr>
@@ -8168,7 +8168,7 @@
       <p:grpSpPr/>
       <p:sp>
         <p:nvSpPr>
-          <p:cNvPr id="2" name="Oval 1"/>
+          <p:cNvPr id="2" name="deckgen:decor"/>
           <p:cNvSpPr/>
           <p:nvPr/>
         </p:nvSpPr>
@@ -8198,7 +8198,7 @@
       </p:sp>
       <p:sp>
         <p:nvSpPr>
-          <p:cNvPr id="3" name="Oval 2"/>
+          <p:cNvPr id="3" name="deckgen:decor"/>
           <p:cNvSpPr/>
           <p:nvPr/>
         </p:nvSpPr>
@@ -8228,7 +8228,7 @@
       </p:sp>
       <p:sp>
         <p:nvSpPr>
-          <p:cNvPr id="4" name="Oval 3"/>
+          <p:cNvPr id="4" name="deckgen:decor"/>
           <p:cNvSpPr/>
           <p:nvPr/>
         </p:nvSpPr>
@@ -9195,7 +9195,7 @@
       <p:grpSpPr/>
       <p:sp>
         <p:nvSpPr>
-          <p:cNvPr id="2" name="Oval 1"/>
+          <p:cNvPr id="2" name="deckgen:decor"/>
           <p:cNvSpPr/>
           <p:nvPr/>
         </p:nvSpPr>
@@ -9225,7 +9225,7 @@
       </p:sp>
       <p:sp>
         <p:nvSpPr>
-          <p:cNvPr id="3" name="Oval 2"/>
+          <p:cNvPr id="3" name="deckgen:decor"/>
           <p:cNvSpPr/>
           <p:nvPr/>
         </p:nvSpPr>
@@ -9255,7 +9255,7 @@
       </p:sp>
       <p:sp>
         <p:nvSpPr>
-          <p:cNvPr id="4" name="Oval 3"/>
+          <p:cNvPr id="4" name="deckgen:decor"/>
           <p:cNvSpPr/>
           <p:nvPr/>
         </p:nvSpPr>
@@ -10293,7 +10293,7 @@
       <p:grpSpPr/>
       <p:sp>
         <p:nvSpPr>
-          <p:cNvPr id="2" name="Oval 1"/>
+          <p:cNvPr id="2" name="deckgen:decor"/>
           <p:cNvSpPr/>
           <p:nvPr/>
         </p:nvSpPr>
@@ -10323,7 +10323,7 @@
       </p:sp>
       <p:sp>
         <p:nvSpPr>
-          <p:cNvPr id="3" name="Oval 2"/>
+          <p:cNvPr id="3" name="deckgen:decor"/>
           <p:cNvSpPr/>
           <p:nvPr/>
         </p:nvSpPr>
@@ -10353,7 +10353,7 @@
       </p:sp>
       <p:sp>
         <p:nvSpPr>
-          <p:cNvPr id="4" name="Oval 3"/>
+          <p:cNvPr id="4" name="deckgen:decor"/>
           <p:cNvSpPr/>
           <p:nvPr/>
         </p:nvSpPr>
@@ -11355,7 +11355,7 @@
       <p:grpSpPr/>
       <p:sp>
         <p:nvSpPr>
-          <p:cNvPr id="2" name="Oval 1"/>
+          <p:cNvPr id="2" name="deckgen:decor"/>
           <p:cNvSpPr/>
           <p:nvPr/>
         </p:nvSpPr>
@@ -11385,7 +11385,7 @@
       </p:sp>
       <p:sp>
         <p:nvSpPr>
-          <p:cNvPr id="3" name="Oval 2"/>
+          <p:cNvPr id="3" name="deckgen:decor"/>
           <p:cNvSpPr/>
           <p:nvPr/>
         </p:nvSpPr>
